--- a/2610/files/배경테마.pptx
+++ b/2610/files/배경테마.pptx
@@ -4,6 +4,9 @@
   <p:sldMasterIdLst>
     <p:sldMasterId id="2147483648" r:id="rId1"/>
   </p:sldMasterIdLst>
+  <p:notesMasterIdLst>
+    <p:notesMasterId r:id="rId3"/>
+  </p:notesMasterIdLst>
   <p:sldIdLst>
     <p:sldId id="256" r:id="rId2"/>
   </p:sldIdLst>
@@ -112,7 +115,7 @@
             <a:srgbClr val="A4A3A4"/>
           </p15:clr>
         </p15:guide>
-        <p15:guide id="2" pos="3840" userDrawn="1">
+        <p15:guide id="2" pos="3863" userDrawn="1">
           <p15:clr>
             <a:srgbClr val="A4A3A4"/>
           </p15:clr>
@@ -121,6 +124,439 @@
     </p:ext>
   </p:extLst>
 </p:presentation>
+</file>
+
+<file path=ppt/notesMasters/notesMaster1.xml><?xml version="1.0" encoding="utf-8"?>
+<p:notesMaster xmlns:a="http://schemas.openxmlformats.org/drawingml/2006/main" xmlns:r="http://schemas.openxmlformats.org/officeDocument/2006/relationships" xmlns:p="http://schemas.openxmlformats.org/presentationml/2006/main">
+  <p:cSld>
+    <p:bg>
+      <p:bgRef idx="1001">
+        <a:schemeClr val="bg1"/>
+      </p:bgRef>
+    </p:bg>
+    <p:spTree>
+      <p:nvGrpSpPr>
+        <p:cNvPr id="1" name=""/>
+        <p:cNvGrpSpPr/>
+        <p:nvPr/>
+      </p:nvGrpSpPr>
+      <p:grpSpPr>
+        <a:xfrm>
+          <a:off x="0" y="0"/>
+          <a:ext cx="0" cy="0"/>
+          <a:chOff x="0" y="0"/>
+          <a:chExt cx="0" cy="0"/>
+        </a:xfrm>
+      </p:grpSpPr>
+      <p:sp>
+        <p:nvSpPr>
+          <p:cNvPr id="2" name="머리글 개체 틀 1"/>
+          <p:cNvSpPr>
+            <a:spLocks noGrp="1"/>
+          </p:cNvSpPr>
+          <p:nvPr>
+            <p:ph type="hdr" sz="quarter"/>
+          </p:nvPr>
+        </p:nvSpPr>
+        <p:spPr>
+          <a:xfrm>
+            <a:off x="0" y="0"/>
+            <a:ext cx="2971800" cy="458788"/>
+          </a:xfrm>
+          <a:prstGeom prst="rect">
+            <a:avLst/>
+          </a:prstGeom>
+        </p:spPr>
+        <p:txBody>
+          <a:bodyPr vert="horz" lIns="91440" tIns="45720" rIns="91440" bIns="45720" rtlCol="0"/>
+          <a:lstStyle>
+            <a:lvl1pPr algn="l">
+              <a:defRPr sz="1200"/>
+            </a:lvl1pPr>
+          </a:lstStyle>
+          <a:p>
+            <a:endParaRPr lang="ko-KR" altLang="en-US"/>
+          </a:p>
+        </p:txBody>
+      </p:sp>
+      <p:sp>
+        <p:nvSpPr>
+          <p:cNvPr id="3" name="날짜 개체 틀 2"/>
+          <p:cNvSpPr>
+            <a:spLocks noGrp="1"/>
+          </p:cNvSpPr>
+          <p:nvPr>
+            <p:ph type="dt" idx="1"/>
+          </p:nvPr>
+        </p:nvSpPr>
+        <p:spPr>
+          <a:xfrm>
+            <a:off x="3884613" y="0"/>
+            <a:ext cx="2971800" cy="458788"/>
+          </a:xfrm>
+          <a:prstGeom prst="rect">
+            <a:avLst/>
+          </a:prstGeom>
+        </p:spPr>
+        <p:txBody>
+          <a:bodyPr vert="horz" lIns="91440" tIns="45720" rIns="91440" bIns="45720" rtlCol="0"/>
+          <a:lstStyle>
+            <a:lvl1pPr algn="r">
+              <a:defRPr sz="1200"/>
+            </a:lvl1pPr>
+          </a:lstStyle>
+          <a:p>
+            <a:fld id="{5A338D8D-186C-4DC8-8169-3415675C4404}" type="datetimeFigureOut">
+              <a:rPr lang="ko-KR" altLang="en-US" smtClean="0"/>
+              <a:t>2026-10-12</a:t>
+            </a:fld>
+            <a:endParaRPr lang="ko-KR" altLang="en-US"/>
+          </a:p>
+        </p:txBody>
+      </p:sp>
+      <p:sp>
+        <p:nvSpPr>
+          <p:cNvPr id="4" name="슬라이드 이미지 개체 틀 3"/>
+          <p:cNvSpPr>
+            <a:spLocks noGrp="1" noRot="1" noChangeAspect="1"/>
+          </p:cNvSpPr>
+          <p:nvPr>
+            <p:ph type="sldImg" idx="2"/>
+          </p:nvPr>
+        </p:nvSpPr>
+        <p:spPr>
+          <a:xfrm>
+            <a:off x="685800" y="1143000"/>
+            <a:ext cx="5486400" cy="3086100"/>
+          </a:xfrm>
+          <a:prstGeom prst="rect">
+            <a:avLst/>
+          </a:prstGeom>
+          <a:noFill/>
+          <a:ln w="12700">
+            <a:solidFill>
+              <a:prstClr val="black"/>
+            </a:solidFill>
+          </a:ln>
+        </p:spPr>
+        <p:txBody>
+          <a:bodyPr vert="horz" lIns="91440" tIns="45720" rIns="91440" bIns="45720" rtlCol="0" anchor="ctr"/>
+          <a:lstStyle/>
+          <a:p>
+            <a:endParaRPr lang="ko-KR" altLang="en-US"/>
+          </a:p>
+        </p:txBody>
+      </p:sp>
+      <p:sp>
+        <p:nvSpPr>
+          <p:cNvPr id="5" name="슬라이드 노트 개체 틀 4"/>
+          <p:cNvSpPr>
+            <a:spLocks noGrp="1"/>
+          </p:cNvSpPr>
+          <p:nvPr>
+            <p:ph type="body" sz="quarter" idx="3"/>
+          </p:nvPr>
+        </p:nvSpPr>
+        <p:spPr>
+          <a:xfrm>
+            <a:off x="685800" y="4400550"/>
+            <a:ext cx="5486400" cy="3600450"/>
+          </a:xfrm>
+          <a:prstGeom prst="rect">
+            <a:avLst/>
+          </a:prstGeom>
+        </p:spPr>
+        <p:txBody>
+          <a:bodyPr vert="horz" lIns="91440" tIns="45720" rIns="91440" bIns="45720" rtlCol="0"/>
+          <a:lstStyle/>
+          <a:p>
+            <a:pPr lvl="0"/>
+            <a:r>
+              <a:rPr lang="ko-KR" altLang="en-US"/>
+              <a:t>마스터 텍스트 스타일을 편집하려면 클릭</a:t>
+            </a:r>
+          </a:p>
+          <a:p>
+            <a:pPr lvl="1"/>
+            <a:r>
+              <a:rPr lang="ko-KR" altLang="en-US"/>
+              <a:t>두 번째 수준</a:t>
+            </a:r>
+          </a:p>
+          <a:p>
+            <a:pPr lvl="2"/>
+            <a:r>
+              <a:rPr lang="ko-KR" altLang="en-US"/>
+              <a:t>세 번째 수준</a:t>
+            </a:r>
+          </a:p>
+          <a:p>
+            <a:pPr lvl="3"/>
+            <a:r>
+              <a:rPr lang="ko-KR" altLang="en-US"/>
+              <a:t>네 번째 수준</a:t>
+            </a:r>
+          </a:p>
+          <a:p>
+            <a:pPr lvl="4"/>
+            <a:r>
+              <a:rPr lang="ko-KR" altLang="en-US"/>
+              <a:t>다섯 번째 수준</a:t>
+            </a:r>
+          </a:p>
+        </p:txBody>
+      </p:sp>
+      <p:sp>
+        <p:nvSpPr>
+          <p:cNvPr id="6" name="바닥글 개체 틀 5"/>
+          <p:cNvSpPr>
+            <a:spLocks noGrp="1"/>
+          </p:cNvSpPr>
+          <p:nvPr>
+            <p:ph type="ftr" sz="quarter" idx="4"/>
+          </p:nvPr>
+        </p:nvSpPr>
+        <p:spPr>
+          <a:xfrm>
+            <a:off x="0" y="8685213"/>
+            <a:ext cx="2971800" cy="458787"/>
+          </a:xfrm>
+          <a:prstGeom prst="rect">
+            <a:avLst/>
+          </a:prstGeom>
+        </p:spPr>
+        <p:txBody>
+          <a:bodyPr vert="horz" lIns="91440" tIns="45720" rIns="91440" bIns="45720" rtlCol="0" anchor="b"/>
+          <a:lstStyle>
+            <a:lvl1pPr algn="l">
+              <a:defRPr sz="1200"/>
+            </a:lvl1pPr>
+          </a:lstStyle>
+          <a:p>
+            <a:endParaRPr lang="ko-KR" altLang="en-US"/>
+          </a:p>
+        </p:txBody>
+      </p:sp>
+      <p:sp>
+        <p:nvSpPr>
+          <p:cNvPr id="7" name="슬라이드 번호 개체 틀 6"/>
+          <p:cNvSpPr>
+            <a:spLocks noGrp="1"/>
+          </p:cNvSpPr>
+          <p:nvPr>
+            <p:ph type="sldNum" sz="quarter" idx="5"/>
+          </p:nvPr>
+        </p:nvSpPr>
+        <p:spPr>
+          <a:xfrm>
+            <a:off x="3884613" y="8685213"/>
+            <a:ext cx="2971800" cy="458787"/>
+          </a:xfrm>
+          <a:prstGeom prst="rect">
+            <a:avLst/>
+          </a:prstGeom>
+        </p:spPr>
+        <p:txBody>
+          <a:bodyPr vert="horz" lIns="91440" tIns="45720" rIns="91440" bIns="45720" rtlCol="0" anchor="b"/>
+          <a:lstStyle>
+            <a:lvl1pPr algn="r">
+              <a:defRPr sz="1200"/>
+            </a:lvl1pPr>
+          </a:lstStyle>
+          <a:p>
+            <a:fld id="{8C461DAD-856D-43AB-ADB5-CCA6A22C9688}" type="slidenum">
+              <a:rPr lang="ko-KR" altLang="en-US" smtClean="0"/>
+              <a:t>‹#›</a:t>
+            </a:fld>
+            <a:endParaRPr lang="ko-KR" altLang="en-US"/>
+          </a:p>
+        </p:txBody>
+      </p:sp>
+    </p:spTree>
+    <p:extLst>
+      <p:ext uri="{BB962C8B-B14F-4D97-AF65-F5344CB8AC3E}">
+        <p14:creationId xmlns:p14="http://schemas.microsoft.com/office/powerpoint/2010/main" val="3786805367"/>
+      </p:ext>
+    </p:extLst>
+  </p:cSld>
+  <p:clrMap bg1="lt1" tx1="dk1" bg2="lt2" tx2="dk2" accent1="accent1" accent2="accent2" accent3="accent3" accent4="accent4" accent5="accent5" accent6="accent6" hlink="hlink" folHlink="folHlink"/>
+  <p:notesStyle>
+    <a:lvl1pPr marL="0" algn="l" defTabSz="914400" rtl="0" eaLnBrk="1" latinLnBrk="1" hangingPunct="1">
+      <a:defRPr sz="1200" kern="1200">
+        <a:solidFill>
+          <a:schemeClr val="tx1"/>
+        </a:solidFill>
+        <a:latin typeface="+mn-lt"/>
+        <a:ea typeface="+mn-ea"/>
+        <a:cs typeface="+mn-cs"/>
+      </a:defRPr>
+    </a:lvl1pPr>
+    <a:lvl2pPr marL="457200" algn="l" defTabSz="914400" rtl="0" eaLnBrk="1" latinLnBrk="1" hangingPunct="1">
+      <a:defRPr sz="1200" kern="1200">
+        <a:solidFill>
+          <a:schemeClr val="tx1"/>
+        </a:solidFill>
+        <a:latin typeface="+mn-lt"/>
+        <a:ea typeface="+mn-ea"/>
+        <a:cs typeface="+mn-cs"/>
+      </a:defRPr>
+    </a:lvl2pPr>
+    <a:lvl3pPr marL="914400" algn="l" defTabSz="914400" rtl="0" eaLnBrk="1" latinLnBrk="1" hangingPunct="1">
+      <a:defRPr sz="1200" kern="1200">
+        <a:solidFill>
+          <a:schemeClr val="tx1"/>
+        </a:solidFill>
+        <a:latin typeface="+mn-lt"/>
+        <a:ea typeface="+mn-ea"/>
+        <a:cs typeface="+mn-cs"/>
+      </a:defRPr>
+    </a:lvl3pPr>
+    <a:lvl4pPr marL="1371600" algn="l" defTabSz="914400" rtl="0" eaLnBrk="1" latinLnBrk="1" hangingPunct="1">
+      <a:defRPr sz="1200" kern="1200">
+        <a:solidFill>
+          <a:schemeClr val="tx1"/>
+        </a:solidFill>
+        <a:latin typeface="+mn-lt"/>
+        <a:ea typeface="+mn-ea"/>
+        <a:cs typeface="+mn-cs"/>
+      </a:defRPr>
+    </a:lvl4pPr>
+    <a:lvl5pPr marL="1828800" algn="l" defTabSz="914400" rtl="0" eaLnBrk="1" latinLnBrk="1" hangingPunct="1">
+      <a:defRPr sz="1200" kern="1200">
+        <a:solidFill>
+          <a:schemeClr val="tx1"/>
+        </a:solidFill>
+        <a:latin typeface="+mn-lt"/>
+        <a:ea typeface="+mn-ea"/>
+        <a:cs typeface="+mn-cs"/>
+      </a:defRPr>
+    </a:lvl5pPr>
+    <a:lvl6pPr marL="2286000" algn="l" defTabSz="914400" rtl="0" eaLnBrk="1" latinLnBrk="1" hangingPunct="1">
+      <a:defRPr sz="1200" kern="1200">
+        <a:solidFill>
+          <a:schemeClr val="tx1"/>
+        </a:solidFill>
+        <a:latin typeface="+mn-lt"/>
+        <a:ea typeface="+mn-ea"/>
+        <a:cs typeface="+mn-cs"/>
+      </a:defRPr>
+    </a:lvl6pPr>
+    <a:lvl7pPr marL="2743200" algn="l" defTabSz="914400" rtl="0" eaLnBrk="1" latinLnBrk="1" hangingPunct="1">
+      <a:defRPr sz="1200" kern="1200">
+        <a:solidFill>
+          <a:schemeClr val="tx1"/>
+        </a:solidFill>
+        <a:latin typeface="+mn-lt"/>
+        <a:ea typeface="+mn-ea"/>
+        <a:cs typeface="+mn-cs"/>
+      </a:defRPr>
+    </a:lvl7pPr>
+    <a:lvl8pPr marL="3200400" algn="l" defTabSz="914400" rtl="0" eaLnBrk="1" latinLnBrk="1" hangingPunct="1">
+      <a:defRPr sz="1200" kern="1200">
+        <a:solidFill>
+          <a:schemeClr val="tx1"/>
+        </a:solidFill>
+        <a:latin typeface="+mn-lt"/>
+        <a:ea typeface="+mn-ea"/>
+        <a:cs typeface="+mn-cs"/>
+      </a:defRPr>
+    </a:lvl8pPr>
+    <a:lvl9pPr marL="3657600" algn="l" defTabSz="914400" rtl="0" eaLnBrk="1" latinLnBrk="1" hangingPunct="1">
+      <a:defRPr sz="1200" kern="1200">
+        <a:solidFill>
+          <a:schemeClr val="tx1"/>
+        </a:solidFill>
+        <a:latin typeface="+mn-lt"/>
+        <a:ea typeface="+mn-ea"/>
+        <a:cs typeface="+mn-cs"/>
+      </a:defRPr>
+    </a:lvl9pPr>
+  </p:notesStyle>
+</p:notesMaster>
+</file>
+
+<file path=ppt/notesSlides/notesSlide1.xml><?xml version="1.0" encoding="utf-8"?>
+<p:notes xmlns:a="http://schemas.openxmlformats.org/drawingml/2006/main" xmlns:r="http://schemas.openxmlformats.org/officeDocument/2006/relationships" xmlns:p="http://schemas.openxmlformats.org/presentationml/2006/main">
+  <p:cSld>
+    <p:spTree>
+      <p:nvGrpSpPr>
+        <p:cNvPr id="1" name=""/>
+        <p:cNvGrpSpPr/>
+        <p:nvPr/>
+      </p:nvGrpSpPr>
+      <p:grpSpPr>
+        <a:xfrm>
+          <a:off x="0" y="0"/>
+          <a:ext cx="0" cy="0"/>
+          <a:chOff x="0" y="0"/>
+          <a:chExt cx="0" cy="0"/>
+        </a:xfrm>
+      </p:grpSpPr>
+      <p:sp>
+        <p:nvSpPr>
+          <p:cNvPr id="2" name="슬라이드 이미지 개체 틀 1"/>
+          <p:cNvSpPr>
+            <a:spLocks noGrp="1" noRot="1" noChangeAspect="1"/>
+          </p:cNvSpPr>
+          <p:nvPr>
+            <p:ph type="sldImg"/>
+          </p:nvPr>
+        </p:nvSpPr>
+        <p:spPr/>
+      </p:sp>
+      <p:sp>
+        <p:nvSpPr>
+          <p:cNvPr id="3" name="슬라이드 노트 개체 틀 2"/>
+          <p:cNvSpPr>
+            <a:spLocks noGrp="1"/>
+          </p:cNvSpPr>
+          <p:nvPr>
+            <p:ph type="body" idx="1"/>
+          </p:nvPr>
+        </p:nvSpPr>
+        <p:spPr/>
+        <p:txBody>
+          <a:bodyPr/>
+          <a:lstStyle/>
+          <a:p>
+            <a:endParaRPr lang="ko-KR" altLang="en-US" dirty="0"/>
+          </a:p>
+        </p:txBody>
+      </p:sp>
+      <p:sp>
+        <p:nvSpPr>
+          <p:cNvPr id="4" name="슬라이드 번호 개체 틀 3"/>
+          <p:cNvSpPr>
+            <a:spLocks noGrp="1"/>
+          </p:cNvSpPr>
+          <p:nvPr>
+            <p:ph type="sldNum" sz="quarter" idx="5"/>
+          </p:nvPr>
+        </p:nvSpPr>
+        <p:spPr/>
+        <p:txBody>
+          <a:bodyPr/>
+          <a:lstStyle/>
+          <a:p>
+            <a:fld id="{8C461DAD-856D-43AB-ADB5-CCA6A22C9688}" type="slidenum">
+              <a:rPr lang="ko-KR" altLang="en-US" smtClean="0"/>
+              <a:t>1</a:t>
+            </a:fld>
+            <a:endParaRPr lang="ko-KR" altLang="en-US"/>
+          </a:p>
+        </p:txBody>
+      </p:sp>
+    </p:spTree>
+    <p:extLst>
+      <p:ext uri="{BB962C8B-B14F-4D97-AF65-F5344CB8AC3E}">
+        <p14:creationId xmlns:p14="http://schemas.microsoft.com/office/powerpoint/2010/main" val="1254186692"/>
+      </p:ext>
+    </p:extLst>
+  </p:cSld>
+  <p:clrMapOvr>
+    <a:masterClrMapping/>
+  </p:clrMapOvr>
+</p:notes>
 </file>
 
 <file path=ppt/slideLayouts/slideLayout1.xml><?xml version="1.0" encoding="utf-8"?>
@@ -3035,66 +3471,14 @@
         </p:nvSpPr>
         <p:spPr>
           <a:xfrm>
-            <a:off x="549876" y="2168611"/>
-            <a:ext cx="5233086" cy="4008352"/>
+            <a:off x="304800" y="1320801"/>
+            <a:ext cx="11684000" cy="5236646"/>
           </a:xfrm>
           <a:prstGeom prst="rect">
             <a:avLst/>
           </a:prstGeom>
           <a:solidFill>
-            <a:schemeClr val="bg1"/>
-          </a:solidFill>
-          <a:ln>
-            <a:noFill/>
-          </a:ln>
-        </p:spPr>
-        <p:style>
-          <a:lnRef idx="2">
-            <a:schemeClr val="accent1">
-              <a:shade val="15000"/>
-            </a:schemeClr>
-          </a:lnRef>
-          <a:fillRef idx="1">
-            <a:schemeClr val="accent1"/>
-          </a:fillRef>
-          <a:effectRef idx="0">
-            <a:schemeClr val="accent1"/>
-          </a:effectRef>
-          <a:fontRef idx="minor">
-            <a:schemeClr val="lt1"/>
-          </a:fontRef>
-        </p:style>
-        <p:txBody>
-          <a:bodyPr rtlCol="0" anchor="ctr"/>
-          <a:lstStyle/>
-          <a:p>
-            <a:pPr algn="ctr"/>
-            <a:endParaRPr lang="ko-KR" altLang="en-US"/>
-          </a:p>
-        </p:txBody>
-      </p:sp>
-      <p:sp>
-        <p:nvSpPr>
-          <p:cNvPr id="9" name="직사각형 8">
-            <a:extLst>
-              <a:ext uri="{FF2B5EF4-FFF2-40B4-BE49-F238E27FC236}">
-                <a16:creationId xmlns:a16="http://schemas.microsoft.com/office/drawing/2014/main" id="{072F4B66-605D-E035-DFBF-6FD3D1785036}"/>
-              </a:ext>
-            </a:extLst>
-          </p:cNvPr>
-          <p:cNvSpPr/>
-          <p:nvPr userDrawn="1"/>
-        </p:nvSpPr>
-        <p:spPr>
-          <a:xfrm>
-            <a:off x="6332838" y="2168611"/>
-            <a:ext cx="5233086" cy="4008352"/>
-          </a:xfrm>
-          <a:prstGeom prst="rect">
-            <a:avLst/>
-          </a:prstGeom>
-          <a:solidFill>
-            <a:schemeClr val="bg1"/>
+            <a:srgbClr val="F3F7FA"/>
           </a:solidFill>
           <a:ln>
             <a:noFill/>
@@ -3508,6 +3892,562 @@
           <a:chExt cx="0" cy="0"/>
         </a:xfrm>
       </p:grpSpPr>
+      <p:grpSp>
+        <p:nvGrpSpPr>
+          <p:cNvPr id="27" name="그룹 26">
+            <a:extLst>
+              <a:ext uri="{FF2B5EF4-FFF2-40B4-BE49-F238E27FC236}">
+                <a16:creationId xmlns:a16="http://schemas.microsoft.com/office/drawing/2014/main" id="{541C253D-005F-F7F9-C71C-4D99D96C948D}"/>
+              </a:ext>
+            </a:extLst>
+          </p:cNvPr>
+          <p:cNvGrpSpPr/>
+          <p:nvPr/>
+        </p:nvGrpSpPr>
+        <p:grpSpPr>
+          <a:xfrm>
+            <a:off x="439764" y="1446743"/>
+            <a:ext cx="5531881" cy="4870776"/>
+            <a:chOff x="439764" y="1446743"/>
+            <a:chExt cx="5531881" cy="4870776"/>
+          </a:xfrm>
+        </p:grpSpPr>
+        <p:sp>
+          <p:nvSpPr>
+            <p:cNvPr id="5" name="사각형: 둥근 모서리 4">
+              <a:extLst>
+                <a:ext uri="{FF2B5EF4-FFF2-40B4-BE49-F238E27FC236}">
+                  <a16:creationId xmlns:a16="http://schemas.microsoft.com/office/drawing/2014/main" id="{E8B231BD-A1A0-F52C-C1B5-24E769CD0050}"/>
+                </a:ext>
+              </a:extLst>
+            </p:cNvPr>
+            <p:cNvSpPr/>
+            <p:nvPr/>
+          </p:nvSpPr>
+          <p:spPr>
+            <a:xfrm>
+              <a:off x="439764" y="1446743"/>
+              <a:ext cx="5531881" cy="4870776"/>
+            </a:xfrm>
+            <a:prstGeom prst="roundRect">
+              <a:avLst>
+                <a:gd name="adj" fmla="val 3000"/>
+              </a:avLst>
+            </a:prstGeom>
+            <a:noFill/>
+            <a:ln w="9525">
+              <a:solidFill>
+                <a:schemeClr val="bg1">
+                  <a:lumMod val="85000"/>
+                </a:schemeClr>
+              </a:solidFill>
+            </a:ln>
+          </p:spPr>
+          <p:style>
+            <a:lnRef idx="2">
+              <a:schemeClr val="accent1">
+                <a:shade val="15000"/>
+              </a:schemeClr>
+            </a:lnRef>
+            <a:fillRef idx="1">
+              <a:schemeClr val="accent1"/>
+            </a:fillRef>
+            <a:effectRef idx="0">
+              <a:schemeClr val="accent1"/>
+            </a:effectRef>
+            <a:fontRef idx="minor">
+              <a:schemeClr val="lt1"/>
+            </a:fontRef>
+          </p:style>
+          <p:txBody>
+            <a:bodyPr rtlCol="0" anchor="ctr"/>
+            <a:lstStyle/>
+            <a:p>
+              <a:pPr algn="ctr"/>
+              <a:endParaRPr lang="ko-KR" altLang="en-US"/>
+            </a:p>
+          </p:txBody>
+        </p:sp>
+        <p:grpSp>
+          <p:nvGrpSpPr>
+            <p:cNvPr id="26" name="그룹 25">
+              <a:extLst>
+                <a:ext uri="{FF2B5EF4-FFF2-40B4-BE49-F238E27FC236}">
+                  <a16:creationId xmlns:a16="http://schemas.microsoft.com/office/drawing/2014/main" id="{8E0E433F-E22E-1CF8-7E7D-8F197E6C76F1}"/>
+                </a:ext>
+              </a:extLst>
+            </p:cNvPr>
+            <p:cNvGrpSpPr/>
+            <p:nvPr/>
+          </p:nvGrpSpPr>
+          <p:grpSpPr>
+            <a:xfrm>
+              <a:off x="447702" y="1446743"/>
+              <a:ext cx="5516006" cy="607482"/>
+              <a:chOff x="447702" y="1446743"/>
+              <a:chExt cx="5516006" cy="607482"/>
+            </a:xfrm>
+          </p:grpSpPr>
+          <p:sp>
+            <p:nvSpPr>
+              <p:cNvPr id="19" name="사각형: 둥근 위쪽 모서리 18">
+                <a:extLst>
+                  <a:ext uri="{FF2B5EF4-FFF2-40B4-BE49-F238E27FC236}">
+                    <a16:creationId xmlns:a16="http://schemas.microsoft.com/office/drawing/2014/main" id="{E3C85027-46B3-BCC8-E951-4B54F93B09C9}"/>
+                  </a:ext>
+                </a:extLst>
+              </p:cNvPr>
+              <p:cNvSpPr/>
+              <p:nvPr/>
+            </p:nvSpPr>
+            <p:spPr>
+              <a:xfrm>
+                <a:off x="447702" y="1450976"/>
+                <a:ext cx="5516006" cy="603249"/>
+              </a:xfrm>
+              <a:prstGeom prst="round2SameRect">
+                <a:avLst>
+                  <a:gd name="adj1" fmla="val 9911"/>
+                  <a:gd name="adj2" fmla="val 0"/>
+                </a:avLst>
+              </a:prstGeom>
+              <a:solidFill>
+                <a:srgbClr val="2C88C6"/>
+              </a:solidFill>
+              <a:ln>
+                <a:noFill/>
+              </a:ln>
+            </p:spPr>
+            <p:style>
+              <a:lnRef idx="2">
+                <a:schemeClr val="accent1">
+                  <a:shade val="15000"/>
+                </a:schemeClr>
+              </a:lnRef>
+              <a:fillRef idx="1">
+                <a:schemeClr val="accent1"/>
+              </a:fillRef>
+              <a:effectRef idx="0">
+                <a:schemeClr val="accent1"/>
+              </a:effectRef>
+              <a:fontRef idx="minor">
+                <a:schemeClr val="lt1"/>
+              </a:fontRef>
+            </p:style>
+            <p:txBody>
+              <a:bodyPr wrap="square" rtlCol="0" anchor="ctr">
+                <a:noAutofit/>
+              </a:bodyPr>
+              <a:lstStyle/>
+              <a:p>
+                <a:pPr algn="ctr"/>
+                <a:r>
+                  <a:rPr lang="en-US" altLang="ko-KR" dirty="0"/>
+                  <a:t> </a:t>
+                </a:r>
+                <a:endParaRPr lang="ko-KR" altLang="en-US" dirty="0"/>
+              </a:p>
+            </p:txBody>
+          </p:sp>
+          <p:sp>
+            <p:nvSpPr>
+              <p:cNvPr id="25" name="자유형: 도형 24">
+                <a:extLst>
+                  <a:ext uri="{FF2B5EF4-FFF2-40B4-BE49-F238E27FC236}">
+                    <a16:creationId xmlns:a16="http://schemas.microsoft.com/office/drawing/2014/main" id="{B807F538-A365-B1CA-4413-2F9B2FC686E1}"/>
+                  </a:ext>
+                </a:extLst>
+              </p:cNvPr>
+              <p:cNvSpPr/>
+              <p:nvPr/>
+            </p:nvSpPr>
+            <p:spPr>
+              <a:xfrm rot="5400000">
+                <a:off x="454579" y="1439866"/>
+                <a:ext cx="568327" cy="582081"/>
+              </a:xfrm>
+              <a:custGeom>
+                <a:avLst/>
+                <a:gdLst>
+                  <a:gd name="connsiteX0" fmla="*/ 0 w 568327"/>
+                  <a:gd name="connsiteY0" fmla="*/ 522293 h 582081"/>
+                  <a:gd name="connsiteX1" fmla="*/ 0 w 568327"/>
+                  <a:gd name="connsiteY1" fmla="*/ 0 h 582081"/>
+                  <a:gd name="connsiteX2" fmla="*/ 568327 w 568327"/>
+                  <a:gd name="connsiteY2" fmla="*/ 582081 h 582081"/>
+                  <a:gd name="connsiteX3" fmla="*/ 59788 w 568327"/>
+                  <a:gd name="connsiteY3" fmla="*/ 582081 h 582081"/>
+                  <a:gd name="connsiteX4" fmla="*/ 0 w 568327"/>
+                  <a:gd name="connsiteY4" fmla="*/ 522293 h 582081"/>
+                </a:gdLst>
+                <a:ahLst/>
+                <a:cxnLst>
+                  <a:cxn ang="0">
+                    <a:pos x="connsiteX0" y="connsiteY0"/>
+                  </a:cxn>
+                  <a:cxn ang="0">
+                    <a:pos x="connsiteX1" y="connsiteY1"/>
+                  </a:cxn>
+                  <a:cxn ang="0">
+                    <a:pos x="connsiteX2" y="connsiteY2"/>
+                  </a:cxn>
+                  <a:cxn ang="0">
+                    <a:pos x="connsiteX3" y="connsiteY3"/>
+                  </a:cxn>
+                  <a:cxn ang="0">
+                    <a:pos x="connsiteX4" y="connsiteY4"/>
+                  </a:cxn>
+                </a:cxnLst>
+                <a:rect l="l" t="t" r="r" b="b"/>
+                <a:pathLst>
+                  <a:path w="568327" h="582081">
+                    <a:moveTo>
+                      <a:pt x="0" y="522293"/>
+                    </a:moveTo>
+                    <a:lnTo>
+                      <a:pt x="0" y="0"/>
+                    </a:lnTo>
+                    <a:lnTo>
+                      <a:pt x="568327" y="582081"/>
+                    </a:lnTo>
+                    <a:lnTo>
+                      <a:pt x="59788" y="582081"/>
+                    </a:lnTo>
+                    <a:cubicBezTo>
+                      <a:pt x="26768" y="582081"/>
+                      <a:pt x="0" y="555313"/>
+                      <a:pt x="0" y="522293"/>
+                    </a:cubicBezTo>
+                    <a:close/>
+                  </a:path>
+                </a:pathLst>
+              </a:custGeom>
+              <a:gradFill flip="none" rotWithShape="1">
+                <a:gsLst>
+                  <a:gs pos="100000">
+                    <a:schemeClr val="accent1">
+                      <a:lumMod val="45000"/>
+                      <a:lumOff val="55000"/>
+                    </a:schemeClr>
+                  </a:gs>
+                  <a:gs pos="33000">
+                    <a:srgbClr val="2C88C6"/>
+                  </a:gs>
+                </a:gsLst>
+                <a:lin ang="13500000" scaled="1"/>
+                <a:tileRect/>
+              </a:gradFill>
+              <a:ln>
+                <a:noFill/>
+              </a:ln>
+            </p:spPr>
+            <p:style>
+              <a:lnRef idx="2">
+                <a:schemeClr val="accent1">
+                  <a:shade val="15000"/>
+                </a:schemeClr>
+              </a:lnRef>
+              <a:fillRef idx="1">
+                <a:schemeClr val="accent1"/>
+              </a:fillRef>
+              <a:effectRef idx="0">
+                <a:schemeClr val="accent1"/>
+              </a:effectRef>
+              <a:fontRef idx="minor">
+                <a:schemeClr val="lt1"/>
+              </a:fontRef>
+            </p:style>
+            <p:txBody>
+              <a:bodyPr wrap="square" rtlCol="0" anchor="ctr">
+                <a:noAutofit/>
+              </a:bodyPr>
+              <a:lstStyle/>
+              <a:p>
+                <a:pPr algn="ctr"/>
+                <a:endParaRPr lang="ko-KR" altLang="en-US"/>
+              </a:p>
+            </p:txBody>
+          </p:sp>
+        </p:grpSp>
+      </p:grpSp>
+      <p:grpSp>
+        <p:nvGrpSpPr>
+          <p:cNvPr id="28" name="그룹 27">
+            <a:extLst>
+              <a:ext uri="{FF2B5EF4-FFF2-40B4-BE49-F238E27FC236}">
+                <a16:creationId xmlns:a16="http://schemas.microsoft.com/office/drawing/2014/main" id="{F61E28EF-A594-77AA-C29A-781113917FB5}"/>
+              </a:ext>
+            </a:extLst>
+          </p:cNvPr>
+          <p:cNvGrpSpPr/>
+          <p:nvPr/>
+        </p:nvGrpSpPr>
+        <p:grpSpPr>
+          <a:xfrm>
+            <a:off x="6307163" y="1446743"/>
+            <a:ext cx="5531881" cy="4870776"/>
+            <a:chOff x="439764" y="1446743"/>
+            <a:chExt cx="5531881" cy="4870776"/>
+          </a:xfrm>
+        </p:grpSpPr>
+        <p:sp>
+          <p:nvSpPr>
+            <p:cNvPr id="29" name="사각형: 둥근 모서리 28">
+              <a:extLst>
+                <a:ext uri="{FF2B5EF4-FFF2-40B4-BE49-F238E27FC236}">
+                  <a16:creationId xmlns:a16="http://schemas.microsoft.com/office/drawing/2014/main" id="{7AB93BD2-CBDC-9967-BF83-75F55497F6E0}"/>
+                </a:ext>
+              </a:extLst>
+            </p:cNvPr>
+            <p:cNvSpPr/>
+            <p:nvPr/>
+          </p:nvSpPr>
+          <p:spPr>
+            <a:xfrm>
+              <a:off x="439764" y="1446743"/>
+              <a:ext cx="5531881" cy="4870776"/>
+            </a:xfrm>
+            <a:prstGeom prst="roundRect">
+              <a:avLst>
+                <a:gd name="adj" fmla="val 3000"/>
+              </a:avLst>
+            </a:prstGeom>
+            <a:noFill/>
+            <a:ln w="9525">
+              <a:solidFill>
+                <a:schemeClr val="bg1">
+                  <a:lumMod val="85000"/>
+                </a:schemeClr>
+              </a:solidFill>
+            </a:ln>
+          </p:spPr>
+          <p:style>
+            <a:lnRef idx="2">
+              <a:schemeClr val="accent1">
+                <a:shade val="15000"/>
+              </a:schemeClr>
+            </a:lnRef>
+            <a:fillRef idx="1">
+              <a:schemeClr val="accent1"/>
+            </a:fillRef>
+            <a:effectRef idx="0">
+              <a:schemeClr val="accent1"/>
+            </a:effectRef>
+            <a:fontRef idx="minor">
+              <a:schemeClr val="lt1"/>
+            </a:fontRef>
+          </p:style>
+          <p:txBody>
+            <a:bodyPr rtlCol="0" anchor="ctr"/>
+            <a:lstStyle/>
+            <a:p>
+              <a:pPr algn="ctr"/>
+              <a:endParaRPr lang="ko-KR" altLang="en-US"/>
+            </a:p>
+          </p:txBody>
+        </p:sp>
+        <p:grpSp>
+          <p:nvGrpSpPr>
+            <p:cNvPr id="30" name="그룹 29">
+              <a:extLst>
+                <a:ext uri="{FF2B5EF4-FFF2-40B4-BE49-F238E27FC236}">
+                  <a16:creationId xmlns:a16="http://schemas.microsoft.com/office/drawing/2014/main" id="{1D94E9F0-C656-179D-8828-9B286E662C46}"/>
+                </a:ext>
+              </a:extLst>
+            </p:cNvPr>
+            <p:cNvGrpSpPr/>
+            <p:nvPr/>
+          </p:nvGrpSpPr>
+          <p:grpSpPr>
+            <a:xfrm>
+              <a:off x="447702" y="1446743"/>
+              <a:ext cx="5516006" cy="607482"/>
+              <a:chOff x="447702" y="1446743"/>
+              <a:chExt cx="5516006" cy="607482"/>
+            </a:xfrm>
+          </p:grpSpPr>
+          <p:sp>
+            <p:nvSpPr>
+              <p:cNvPr id="31" name="사각형: 둥근 위쪽 모서리 30">
+                <a:extLst>
+                  <a:ext uri="{FF2B5EF4-FFF2-40B4-BE49-F238E27FC236}">
+                    <a16:creationId xmlns:a16="http://schemas.microsoft.com/office/drawing/2014/main" id="{065679D6-2104-DE2E-178D-388D6AEB4FB8}"/>
+                  </a:ext>
+                </a:extLst>
+              </p:cNvPr>
+              <p:cNvSpPr/>
+              <p:nvPr/>
+            </p:nvSpPr>
+            <p:spPr>
+              <a:xfrm>
+                <a:off x="447702" y="1450976"/>
+                <a:ext cx="5516006" cy="603249"/>
+              </a:xfrm>
+              <a:prstGeom prst="round2SameRect">
+                <a:avLst>
+                  <a:gd name="adj1" fmla="val 9911"/>
+                  <a:gd name="adj2" fmla="val 0"/>
+                </a:avLst>
+              </a:prstGeom>
+              <a:solidFill>
+                <a:srgbClr val="2C88C6"/>
+              </a:solidFill>
+              <a:ln>
+                <a:noFill/>
+              </a:ln>
+            </p:spPr>
+            <p:style>
+              <a:lnRef idx="2">
+                <a:schemeClr val="accent1">
+                  <a:shade val="15000"/>
+                </a:schemeClr>
+              </a:lnRef>
+              <a:fillRef idx="1">
+                <a:schemeClr val="accent1"/>
+              </a:fillRef>
+              <a:effectRef idx="0">
+                <a:schemeClr val="accent1"/>
+              </a:effectRef>
+              <a:fontRef idx="minor">
+                <a:schemeClr val="lt1"/>
+              </a:fontRef>
+            </p:style>
+            <p:txBody>
+              <a:bodyPr wrap="square" rtlCol="0" anchor="ctr">
+                <a:noAutofit/>
+              </a:bodyPr>
+              <a:lstStyle/>
+              <a:p>
+                <a:pPr algn="ctr"/>
+                <a:r>
+                  <a:rPr lang="en-US" altLang="ko-KR" dirty="0"/>
+                  <a:t> </a:t>
+                </a:r>
+                <a:endParaRPr lang="ko-KR" altLang="en-US" dirty="0"/>
+              </a:p>
+            </p:txBody>
+          </p:sp>
+          <p:sp>
+            <p:nvSpPr>
+              <p:cNvPr id="32" name="자유형: 도형 31">
+                <a:extLst>
+                  <a:ext uri="{FF2B5EF4-FFF2-40B4-BE49-F238E27FC236}">
+                    <a16:creationId xmlns:a16="http://schemas.microsoft.com/office/drawing/2014/main" id="{11F5E4A8-50AE-E329-05F5-E4359310BC4D}"/>
+                  </a:ext>
+                </a:extLst>
+              </p:cNvPr>
+              <p:cNvSpPr/>
+              <p:nvPr/>
+            </p:nvSpPr>
+            <p:spPr>
+              <a:xfrm rot="5400000">
+                <a:off x="454579" y="1439866"/>
+                <a:ext cx="568327" cy="582081"/>
+              </a:xfrm>
+              <a:custGeom>
+                <a:avLst/>
+                <a:gdLst>
+                  <a:gd name="connsiteX0" fmla="*/ 0 w 568327"/>
+                  <a:gd name="connsiteY0" fmla="*/ 522293 h 582081"/>
+                  <a:gd name="connsiteX1" fmla="*/ 0 w 568327"/>
+                  <a:gd name="connsiteY1" fmla="*/ 0 h 582081"/>
+                  <a:gd name="connsiteX2" fmla="*/ 568327 w 568327"/>
+                  <a:gd name="connsiteY2" fmla="*/ 582081 h 582081"/>
+                  <a:gd name="connsiteX3" fmla="*/ 59788 w 568327"/>
+                  <a:gd name="connsiteY3" fmla="*/ 582081 h 582081"/>
+                  <a:gd name="connsiteX4" fmla="*/ 0 w 568327"/>
+                  <a:gd name="connsiteY4" fmla="*/ 522293 h 582081"/>
+                </a:gdLst>
+                <a:ahLst/>
+                <a:cxnLst>
+                  <a:cxn ang="0">
+                    <a:pos x="connsiteX0" y="connsiteY0"/>
+                  </a:cxn>
+                  <a:cxn ang="0">
+                    <a:pos x="connsiteX1" y="connsiteY1"/>
+                  </a:cxn>
+                  <a:cxn ang="0">
+                    <a:pos x="connsiteX2" y="connsiteY2"/>
+                  </a:cxn>
+                  <a:cxn ang="0">
+                    <a:pos x="connsiteX3" y="connsiteY3"/>
+                  </a:cxn>
+                  <a:cxn ang="0">
+                    <a:pos x="connsiteX4" y="connsiteY4"/>
+                  </a:cxn>
+                </a:cxnLst>
+                <a:rect l="l" t="t" r="r" b="b"/>
+                <a:pathLst>
+                  <a:path w="568327" h="582081">
+                    <a:moveTo>
+                      <a:pt x="0" y="522293"/>
+                    </a:moveTo>
+                    <a:lnTo>
+                      <a:pt x="0" y="0"/>
+                    </a:lnTo>
+                    <a:lnTo>
+                      <a:pt x="568327" y="582081"/>
+                    </a:lnTo>
+                    <a:lnTo>
+                      <a:pt x="59788" y="582081"/>
+                    </a:lnTo>
+                    <a:cubicBezTo>
+                      <a:pt x="26768" y="582081"/>
+                      <a:pt x="0" y="555313"/>
+                      <a:pt x="0" y="522293"/>
+                    </a:cubicBezTo>
+                    <a:close/>
+                  </a:path>
+                </a:pathLst>
+              </a:custGeom>
+              <a:gradFill flip="none" rotWithShape="1">
+                <a:gsLst>
+                  <a:gs pos="100000">
+                    <a:schemeClr val="accent1">
+                      <a:lumMod val="45000"/>
+                      <a:lumOff val="55000"/>
+                    </a:schemeClr>
+                  </a:gs>
+                  <a:gs pos="33000">
+                    <a:srgbClr val="2C88C6"/>
+                  </a:gs>
+                </a:gsLst>
+                <a:lin ang="13500000" scaled="1"/>
+                <a:tileRect/>
+              </a:gradFill>
+              <a:ln>
+                <a:noFill/>
+              </a:ln>
+            </p:spPr>
+            <p:style>
+              <a:lnRef idx="2">
+                <a:schemeClr val="accent1">
+                  <a:shade val="15000"/>
+                </a:schemeClr>
+              </a:lnRef>
+              <a:fillRef idx="1">
+                <a:schemeClr val="accent1"/>
+              </a:fillRef>
+              <a:effectRef idx="0">
+                <a:schemeClr val="accent1"/>
+              </a:effectRef>
+              <a:fontRef idx="minor">
+                <a:schemeClr val="lt1"/>
+              </a:fontRef>
+            </p:style>
+            <p:txBody>
+              <a:bodyPr wrap="square" rtlCol="0" anchor="ctr">
+                <a:noAutofit/>
+              </a:bodyPr>
+              <a:lstStyle/>
+              <a:p>
+                <a:pPr algn="ctr"/>
+                <a:endParaRPr lang="ko-KR" altLang="en-US"/>
+              </a:p>
+            </p:txBody>
+          </p:sp>
+        </p:grpSp>
+      </p:grpSp>
     </p:spTree>
     <p:extLst>
       <p:ext uri="{BB962C8B-B14F-4D97-AF65-F5344CB8AC3E}">
@@ -3834,4 +4774,319 @@
     </a:ext>
   </a:extLst>
 </a:theme>
+</file>
+
+<file path=ppt/theme/theme2.xml><?xml version="1.0" encoding="utf-8"?>
+<a:theme xmlns:a="http://schemas.openxmlformats.org/drawingml/2006/main" name="Office 테마">
+  <a:themeElements>
+    <a:clrScheme name="Office">
+      <a:dk1>
+        <a:sysClr val="windowText" lastClr="000000"/>
+      </a:dk1>
+      <a:lt1>
+        <a:sysClr val="window" lastClr="FFFFFF"/>
+      </a:lt1>
+      <a:dk2>
+        <a:srgbClr val="0E2841"/>
+      </a:dk2>
+      <a:lt2>
+        <a:srgbClr val="E8E8E8"/>
+      </a:lt2>
+      <a:accent1>
+        <a:srgbClr val="156082"/>
+      </a:accent1>
+      <a:accent2>
+        <a:srgbClr val="E97132"/>
+      </a:accent2>
+      <a:accent3>
+        <a:srgbClr val="196B24"/>
+      </a:accent3>
+      <a:accent4>
+        <a:srgbClr val="0F9ED5"/>
+      </a:accent4>
+      <a:accent5>
+        <a:srgbClr val="A02B93"/>
+      </a:accent5>
+      <a:accent6>
+        <a:srgbClr val="4EA72E"/>
+      </a:accent6>
+      <a:hlink>
+        <a:srgbClr val="467886"/>
+      </a:hlink>
+      <a:folHlink>
+        <a:srgbClr val="96607D"/>
+      </a:folHlink>
+    </a:clrScheme>
+    <a:fontScheme name="Office">
+      <a:majorFont>
+        <a:latin typeface="맑은 고딕" panose="02110004020202020204"/>
+        <a:ea typeface=""/>
+        <a:cs typeface=""/>
+        <a:font script="Jpan" typeface="游ゴシック Light"/>
+        <a:font script="Hang" typeface="맑은 고딕"/>
+        <a:font script="Hans" typeface="等线 Light"/>
+        <a:font script="Hant" typeface="新細明體"/>
+        <a:font script="Arab" typeface="Times New Roman"/>
+        <a:font script="Hebr" typeface="Times New Roman"/>
+        <a:font script="Thai" typeface="Angsana New"/>
+        <a:font script="Ethi" typeface="Nyala"/>
+        <a:font script="Beng" typeface="Vrinda"/>
+        <a:font script="Gujr" typeface="Shruti"/>
+        <a:font script="Khmr" typeface="MoolBoran"/>
+        <a:font script="Knda" typeface="Tunga"/>
+        <a:font script="Guru" typeface="Raavi"/>
+        <a:font script="Cans" typeface="Euphemia"/>
+        <a:font script="Cher" typeface="Plantagenet Cherokee"/>
+        <a:font script="Yiii" typeface="Microsoft Yi Baiti"/>
+        <a:font script="Tibt" typeface="Microsoft Himalaya"/>
+        <a:font script="Thaa" typeface="MV Boli"/>
+        <a:font script="Deva" typeface="Mangal"/>
+        <a:font script="Telu" typeface="Gautami"/>
+        <a:font script="Taml" typeface="Latha"/>
+        <a:font script="Syrc" typeface="Estrangelo Edessa"/>
+        <a:font script="Orya" typeface="Kalinga"/>
+        <a:font script="Mlym" typeface="Kartika"/>
+        <a:font script="Laoo" typeface="DokChampa"/>
+        <a:font script="Sinh" typeface="Iskoola Pota"/>
+        <a:font script="Mong" typeface="Mongolian Baiti"/>
+        <a:font script="Viet" typeface="Times New Roman"/>
+        <a:font script="Uigh" typeface="Microsoft Uighur"/>
+        <a:font script="Geor" typeface="Sylfaen"/>
+        <a:font script="Armn" typeface="Arial"/>
+        <a:font script="Bugi" typeface="Leelawadee UI"/>
+        <a:font script="Bopo" typeface="Microsoft JhengHei"/>
+        <a:font script="Java" typeface="Javanese Text"/>
+        <a:font script="Lisu" typeface="Segoe UI"/>
+        <a:font script="Mymr" typeface="Myanmar Text"/>
+        <a:font script="Nkoo" typeface="Ebrima"/>
+        <a:font script="Olck" typeface="Nirmala UI"/>
+        <a:font script="Osma" typeface="Ebrima"/>
+        <a:font script="Phag" typeface="Phagspa"/>
+        <a:font script="Syrn" typeface="Estrangelo Edessa"/>
+        <a:font script="Syrj" typeface="Estrangelo Edessa"/>
+        <a:font script="Syre" typeface="Estrangelo Edessa"/>
+        <a:font script="Sora" typeface="Nirmala UI"/>
+        <a:font script="Tale" typeface="Microsoft Tai Le"/>
+        <a:font script="Talu" typeface="Microsoft New Tai Lue"/>
+        <a:font script="Tfng" typeface="Ebrima"/>
+      </a:majorFont>
+      <a:minorFont>
+        <a:latin typeface="맑은 고딕" panose="02110004020202020204"/>
+        <a:ea typeface=""/>
+        <a:cs typeface=""/>
+        <a:font script="Jpan" typeface="游ゴシック"/>
+        <a:font script="Hang" typeface="맑은 고딕"/>
+        <a:font script="Hans" typeface="等线"/>
+        <a:font script="Hant" typeface="新細明體"/>
+        <a:font script="Arab" typeface="Arial"/>
+        <a:font script="Hebr" typeface="Arial"/>
+        <a:font script="Thai" typeface="Cordia New"/>
+        <a:font script="Ethi" typeface="Nyala"/>
+        <a:font script="Beng" typeface="Vrinda"/>
+        <a:font script="Gujr" typeface="Shruti"/>
+        <a:font script="Khmr" typeface="DaunPenh"/>
+        <a:font script="Knda" typeface="Tunga"/>
+        <a:font script="Guru" typeface="Raavi"/>
+        <a:font script="Cans" typeface="Euphemia"/>
+        <a:font script="Cher" typeface="Plantagenet Cherokee"/>
+        <a:font script="Yiii" typeface="Microsoft Yi Baiti"/>
+        <a:font script="Tibt" typeface="Microsoft Himalaya"/>
+        <a:font script="Thaa" typeface="MV Boli"/>
+        <a:font script="Deva" typeface="Mangal"/>
+        <a:font script="Telu" typeface="Gautami"/>
+        <a:font script="Taml" typeface="Latha"/>
+        <a:font script="Syrc" typeface="Estrangelo Edessa"/>
+        <a:font script="Orya" typeface="Kalinga"/>
+        <a:font script="Mlym" typeface="Kartika"/>
+        <a:font script="Laoo" typeface="DokChampa"/>
+        <a:font script="Sinh" typeface="Iskoola Pota"/>
+        <a:font script="Mong" typeface="Mongolian Baiti"/>
+        <a:font script="Viet" typeface="Arial"/>
+        <a:font script="Uigh" typeface="Microsoft Uighur"/>
+        <a:font script="Geor" typeface="Sylfaen"/>
+        <a:font script="Armn" typeface="Arial"/>
+        <a:font script="Bugi" typeface="Leelawadee UI"/>
+        <a:font script="Bopo" typeface="Microsoft JhengHei"/>
+        <a:font script="Java" typeface="Javanese Text"/>
+        <a:font script="Lisu" typeface="Segoe UI"/>
+        <a:font script="Mymr" typeface="Myanmar Text"/>
+        <a:font script="Nkoo" typeface="Ebrima"/>
+        <a:font script="Olck" typeface="Nirmala UI"/>
+        <a:font script="Osma" typeface="Ebrima"/>
+        <a:font script="Phag" typeface="Phagspa"/>
+        <a:font script="Syrn" typeface="Estrangelo Edessa"/>
+        <a:font script="Syrj" typeface="Estrangelo Edessa"/>
+        <a:font script="Syre" typeface="Estrangelo Edessa"/>
+        <a:font script="Sora" typeface="Nirmala UI"/>
+        <a:font script="Tale" typeface="Microsoft Tai Le"/>
+        <a:font script="Talu" typeface="Microsoft New Tai Lue"/>
+        <a:font script="Tfng" typeface="Ebrima"/>
+      </a:minorFont>
+    </a:fontScheme>
+    <a:fmtScheme name="Office">
+      <a:fillStyleLst>
+        <a:solidFill>
+          <a:schemeClr val="phClr"/>
+        </a:solidFill>
+        <a:gradFill rotWithShape="1">
+          <a:gsLst>
+            <a:gs pos="0">
+              <a:schemeClr val="phClr">
+                <a:lumMod val="110000"/>
+                <a:satMod val="105000"/>
+                <a:tint val="67000"/>
+              </a:schemeClr>
+            </a:gs>
+            <a:gs pos="50000">
+              <a:schemeClr val="phClr">
+                <a:lumMod val="105000"/>
+                <a:satMod val="103000"/>
+                <a:tint val="73000"/>
+              </a:schemeClr>
+            </a:gs>
+            <a:gs pos="100000">
+              <a:schemeClr val="phClr">
+                <a:lumMod val="105000"/>
+                <a:satMod val="109000"/>
+                <a:tint val="81000"/>
+              </a:schemeClr>
+            </a:gs>
+          </a:gsLst>
+          <a:lin ang="5400000" scaled="0"/>
+        </a:gradFill>
+        <a:gradFill rotWithShape="1">
+          <a:gsLst>
+            <a:gs pos="0">
+              <a:schemeClr val="phClr">
+                <a:satMod val="103000"/>
+                <a:lumMod val="102000"/>
+                <a:tint val="94000"/>
+              </a:schemeClr>
+            </a:gs>
+            <a:gs pos="50000">
+              <a:schemeClr val="phClr">
+                <a:satMod val="110000"/>
+                <a:lumMod val="100000"/>
+                <a:shade val="100000"/>
+              </a:schemeClr>
+            </a:gs>
+            <a:gs pos="100000">
+              <a:schemeClr val="phClr">
+                <a:lumMod val="99000"/>
+                <a:satMod val="120000"/>
+                <a:shade val="78000"/>
+              </a:schemeClr>
+            </a:gs>
+          </a:gsLst>
+          <a:lin ang="5400000" scaled="0"/>
+        </a:gradFill>
+      </a:fillStyleLst>
+      <a:lnStyleLst>
+        <a:ln w="12700" cap="flat" cmpd="sng" algn="ctr">
+          <a:solidFill>
+            <a:schemeClr val="phClr"/>
+          </a:solidFill>
+          <a:prstDash val="solid"/>
+          <a:miter lim="800000"/>
+        </a:ln>
+        <a:ln w="19050" cap="flat" cmpd="sng" algn="ctr">
+          <a:solidFill>
+            <a:schemeClr val="phClr"/>
+          </a:solidFill>
+          <a:prstDash val="solid"/>
+          <a:miter lim="800000"/>
+        </a:ln>
+        <a:ln w="25400" cap="flat" cmpd="sng" algn="ctr">
+          <a:solidFill>
+            <a:schemeClr val="phClr"/>
+          </a:solidFill>
+          <a:prstDash val="solid"/>
+          <a:miter lim="800000"/>
+        </a:ln>
+      </a:lnStyleLst>
+      <a:effectStyleLst>
+        <a:effectStyle>
+          <a:effectLst/>
+        </a:effectStyle>
+        <a:effectStyle>
+          <a:effectLst/>
+        </a:effectStyle>
+        <a:effectStyle>
+          <a:effectLst>
+            <a:outerShdw blurRad="57150" dist="19050" dir="5400000" algn="ctr" rotWithShape="0">
+              <a:srgbClr val="000000">
+                <a:alpha val="63000"/>
+              </a:srgbClr>
+            </a:outerShdw>
+          </a:effectLst>
+        </a:effectStyle>
+      </a:effectStyleLst>
+      <a:bgFillStyleLst>
+        <a:solidFill>
+          <a:schemeClr val="phClr"/>
+        </a:solidFill>
+        <a:solidFill>
+          <a:schemeClr val="phClr">
+            <a:tint val="95000"/>
+            <a:satMod val="170000"/>
+          </a:schemeClr>
+        </a:solidFill>
+        <a:gradFill rotWithShape="1">
+          <a:gsLst>
+            <a:gs pos="0">
+              <a:schemeClr val="phClr">
+                <a:tint val="93000"/>
+                <a:satMod val="150000"/>
+                <a:shade val="98000"/>
+                <a:lumMod val="102000"/>
+              </a:schemeClr>
+            </a:gs>
+            <a:gs pos="50000">
+              <a:schemeClr val="phClr">
+                <a:tint val="98000"/>
+                <a:satMod val="130000"/>
+                <a:shade val="90000"/>
+                <a:lumMod val="103000"/>
+              </a:schemeClr>
+            </a:gs>
+            <a:gs pos="100000">
+              <a:schemeClr val="phClr">
+                <a:shade val="63000"/>
+                <a:satMod val="120000"/>
+              </a:schemeClr>
+            </a:gs>
+          </a:gsLst>
+          <a:lin ang="5400000" scaled="0"/>
+        </a:gradFill>
+      </a:bgFillStyleLst>
+    </a:fmtScheme>
+  </a:themeElements>
+  <a:objectDefaults>
+    <a:lnDef>
+      <a:spPr/>
+      <a:bodyPr/>
+      <a:lstStyle/>
+      <a:style>
+        <a:lnRef idx="2">
+          <a:schemeClr val="accent1"/>
+        </a:lnRef>
+        <a:fillRef idx="0">
+          <a:schemeClr val="accent1"/>
+        </a:fillRef>
+        <a:effectRef idx="1">
+          <a:schemeClr val="accent1"/>
+        </a:effectRef>
+        <a:fontRef idx="minor">
+          <a:schemeClr val="tx1"/>
+        </a:fontRef>
+      </a:style>
+    </a:lnDef>
+  </a:objectDefaults>
+  <a:extraClrSchemeLst/>
+  <a:extLst>
+    <a:ext uri="{05A4C25C-085E-4340-85A3-A5531E510DB2}">
+      <thm15:themeFamily xmlns:thm15="http://schemas.microsoft.com/office/thememl/2012/main" name="Office Theme" id="{2E142A2C-CD16-42D6-873A-C26D2A0506FA}" vid="{1BDDFF52-6CD6-40A5-AB3C-68EB2F1E4D0A}"/>
+    </a:ext>
+  </a:extLst>
+</a:theme>
 </file>